--- a/docs/圖書館GNN推薦系統_簡報.pptx
+++ b/docs/圖書館GNN推薦系統_簡報.pptx
@@ -6975,10 +6975,10 @@
                 </a:solidFill>
                 <a:latin typeface="Microsoft JhengHei"/>
               </a:rPr>
-              <a:t>LightGCN: R@10 = 0.263 ± 0.0003
-LightGCN-SI: 0.267 ± 0.0006
+              <a:t>LightGCN: R@10 = 0.265 ± 0.0003
 LightGCN-Multi: 0.268 ± 0.0005
-→ std 極小，差異統計顯著</a:t>
+★ Multi-Opt: 0.2711 ± 0.0004
+→ std 極小，最佳模型 robust</a:t>
             </a:r>
           </a:p>
         </p:txBody>
@@ -7061,7 +7061,7 @@
                 </a:solidFill>
                 <a:latin typeface="Microsoft JhengHei"/>
               </a:rPr>
-              <a:t>超參數 Grid (12 組)</a:t>
+              <a:t>超參數 Grid + Optuna</a:t>
             </a:r>
           </a:p>
         </p:txBody>
@@ -7096,10 +7096,10 @@
                 </a:solidFill>
                 <a:latin typeface="Microsoft JhengHei"/>
               </a:rPr>
-              <a:t>embed=128, layers=2 最佳
-(R@20=0.3034)
-embed 越大越好
-layers 4 過度平滑反退化</a:t>
+              <a:t>Grid 最佳 (d=128,L=2):
+  R@20 = 0.3034
+Optuna 20 trials → R@20 = 0.3233
+→ 自動調參 +6.6%</a:t>
             </a:r>
           </a:p>
         </p:txBody>
